--- a/I Exalt Thee-CH.pptx
+++ b/I Exalt Thee-CH.pptx
@@ -6,7 +6,11 @@
   </p:sldMasterIdLst>
   <p:sldIdLst>
     <p:sldId id="257" r:id="rId2"/>
-    <p:sldId id="258" r:id="rId3"/>
+    <p:sldId id="259" r:id="rId3"/>
+    <p:sldId id="261" r:id="rId4"/>
+    <p:sldId id="258" r:id="rId5"/>
+    <p:sldId id="260" r:id="rId6"/>
+    <p:sldId id="262" r:id="rId7"/>
   </p:sldIdLst>
   <p:sldSz cx="12192000" cy="6858000"/>
   <p:notesSz cx="6858000" cy="9144000"/>
@@ -260,7 +264,7 @@
           <a:p>
             <a:fld id="{5448A3D2-9408-4143-A73F-7F223505335E}" type="datetimeFigureOut">
               <a:rPr lang="en-US" smtClean="0"/>
-              <a:t>4/4/26</a:t>
+              <a:t>6/27/26</a:t>
             </a:fld>
             <a:endParaRPr lang="en-US"/>
           </a:p>
@@ -458,7 +462,7 @@
           <a:p>
             <a:fld id="{5448A3D2-9408-4143-A73F-7F223505335E}" type="datetimeFigureOut">
               <a:rPr lang="en-US" smtClean="0"/>
-              <a:t>4/4/26</a:t>
+              <a:t>6/27/26</a:t>
             </a:fld>
             <a:endParaRPr lang="en-US"/>
           </a:p>
@@ -666,7 +670,7 @@
           <a:p>
             <a:fld id="{5448A3D2-9408-4143-A73F-7F223505335E}" type="datetimeFigureOut">
               <a:rPr lang="en-US" smtClean="0"/>
-              <a:t>4/4/26</a:t>
+              <a:t>6/27/26</a:t>
             </a:fld>
             <a:endParaRPr lang="en-US"/>
           </a:p>
@@ -864,7 +868,7 @@
           <a:p>
             <a:fld id="{5448A3D2-9408-4143-A73F-7F223505335E}" type="datetimeFigureOut">
               <a:rPr lang="en-US" smtClean="0"/>
-              <a:t>4/4/26</a:t>
+              <a:t>6/27/26</a:t>
             </a:fld>
             <a:endParaRPr lang="en-US"/>
           </a:p>
@@ -1139,7 +1143,7 @@
           <a:p>
             <a:fld id="{5448A3D2-9408-4143-A73F-7F223505335E}" type="datetimeFigureOut">
               <a:rPr lang="en-US" smtClean="0"/>
-              <a:t>4/4/26</a:t>
+              <a:t>6/27/26</a:t>
             </a:fld>
             <a:endParaRPr lang="en-US"/>
           </a:p>
@@ -1404,7 +1408,7 @@
           <a:p>
             <a:fld id="{5448A3D2-9408-4143-A73F-7F223505335E}" type="datetimeFigureOut">
               <a:rPr lang="en-US" smtClean="0"/>
-              <a:t>4/4/26</a:t>
+              <a:t>6/27/26</a:t>
             </a:fld>
             <a:endParaRPr lang="en-US"/>
           </a:p>
@@ -1816,7 +1820,7 @@
           <a:p>
             <a:fld id="{5448A3D2-9408-4143-A73F-7F223505335E}" type="datetimeFigureOut">
               <a:rPr lang="en-US" smtClean="0"/>
-              <a:t>4/4/26</a:t>
+              <a:t>6/27/26</a:t>
             </a:fld>
             <a:endParaRPr lang="en-US"/>
           </a:p>
@@ -1957,7 +1961,7 @@
           <a:p>
             <a:fld id="{5448A3D2-9408-4143-A73F-7F223505335E}" type="datetimeFigureOut">
               <a:rPr lang="en-US" smtClean="0"/>
-              <a:t>4/4/26</a:t>
+              <a:t>6/27/26</a:t>
             </a:fld>
             <a:endParaRPr lang="en-US"/>
           </a:p>
@@ -2070,7 +2074,7 @@
           <a:p>
             <a:fld id="{5448A3D2-9408-4143-A73F-7F223505335E}" type="datetimeFigureOut">
               <a:rPr lang="en-US" smtClean="0"/>
-              <a:t>4/4/26</a:t>
+              <a:t>6/27/26</a:t>
             </a:fld>
             <a:endParaRPr lang="en-US"/>
           </a:p>
@@ -2381,7 +2385,7 @@
           <a:p>
             <a:fld id="{5448A3D2-9408-4143-A73F-7F223505335E}" type="datetimeFigureOut">
               <a:rPr lang="en-US" smtClean="0"/>
-              <a:t>4/4/26</a:t>
+              <a:t>6/27/26</a:t>
             </a:fld>
             <a:endParaRPr lang="en-US"/>
           </a:p>
@@ -2669,7 +2673,7 @@
           <a:p>
             <a:fld id="{5448A3D2-9408-4143-A73F-7F223505335E}" type="datetimeFigureOut">
               <a:rPr lang="en-US" smtClean="0"/>
-              <a:t>4/4/26</a:t>
+              <a:t>6/27/26</a:t>
             </a:fld>
             <a:endParaRPr lang="en-US"/>
           </a:p>
@@ -2910,7 +2914,7 @@
           <a:p>
             <a:fld id="{5448A3D2-9408-4143-A73F-7F223505335E}" type="datetimeFigureOut">
               <a:rPr lang="en-US" smtClean="0"/>
-              <a:t>4/4/26</a:t>
+              <a:t>6/27/26</a:t>
             </a:fld>
             <a:endParaRPr lang="en-US"/>
           </a:p>
@@ -3316,7 +3320,7 @@
     <p:bg>
       <p:bgPr>
         <a:solidFill>
-          <a:schemeClr val="tx1"/>
+          <a:schemeClr val="bg1"/>
         </a:solidFill>
         <a:effectLst/>
       </p:bgPr>
@@ -3341,143 +3345,627 @@
           <a:chExt cx="0" cy="0"/>
         </a:xfrm>
       </p:grpSpPr>
-      <p:sp>
-        <p:nvSpPr>
-          <p:cNvPr id="2" name="Title 1">
-            <a:extLst>
-              <a:ext uri="{FF2B5EF4-FFF2-40B4-BE49-F238E27FC236}">
-                <a16:creationId xmlns:a16="http://schemas.microsoft.com/office/drawing/2014/main" id="{0F560125-5CE0-EB7A-F19E-9B5FA7400842}"/>
-              </a:ext>
-            </a:extLst>
-          </p:cNvPr>
-          <p:cNvSpPr>
-            <a:spLocks noGrp="1"/>
-          </p:cNvSpPr>
-          <p:nvPr>
-            <p:ph type="ctrTitle"/>
+      <p:sp useBgFill="1">
+        <p:nvSpPr>
+          <p:cNvPr id="14" name="Rectangle 13">
+            <a:extLst>
+              <a:ext uri="{FF2B5EF4-FFF2-40B4-BE49-F238E27FC236}">
+                <a16:creationId xmlns:a16="http://schemas.microsoft.com/office/drawing/2014/main" id="{5D9FC6AC-4A12-4825-8ABE-0732B8EF4D16}"/>
+              </a:ext>
+              <a:ext uri="{C183D7F6-B498-43B3-948B-1728B52AA6E4}">
+                <adec:decorative xmlns:adec="http://schemas.microsoft.com/office/drawing/2017/decorative" val="1"/>
+              </a:ext>
+            </a:extLst>
+          </p:cNvPr>
+          <p:cNvSpPr>
+            <a:spLocks noGrp="1" noRot="1" noChangeAspect="1" noMove="1" noResize="1" noEditPoints="1" noAdjustHandles="1" noChangeArrowheads="1" noChangeShapeType="1" noTextEdit="1"/>
+          </p:cNvSpPr>
+          <p:nvPr>
+            <p:extLst>
+              <p:ext uri="{386F3935-93C4-4BCD-93E2-E3B085C9AB24}">
+                <p16:designElem xmlns:p16="http://schemas.microsoft.com/office/powerpoint/2015/main" val="1"/>
+              </p:ext>
+            </p:extLst>
           </p:nvPr>
         </p:nvSpPr>
         <p:spPr>
           <a:xfrm>
-            <a:off x="0" y="22612"/>
-            <a:ext cx="12192000" cy="953572"/>
+            <a:off x="0" y="0"/>
+            <a:ext cx="12188952" cy="6858000"/>
           </a:xfrm>
+          <a:prstGeom prst="rect">
+            <a:avLst/>
+          </a:prstGeom>
+          <a:ln>
+            <a:noFill/>
+          </a:ln>
         </p:spPr>
-        <p:txBody>
-          <a:bodyPr/>
-          <a:lstStyle/>
-          <a:p>
-            <a:pPr algn="l"/>
-            <a:r>
-              <a:rPr lang="en-US" dirty="0">
-                <a:solidFill>
-                  <a:schemeClr val="bg1"/>
-                </a:solidFill>
-                <a:latin typeface="Avenir Book" panose="02000503020000020003" pitchFamily="2" charset="0"/>
-              </a:rPr>
-              <a:t>I Exalt Thee</a:t>
-            </a:r>
-          </a:p>
-        </p:txBody>
-      </p:sp>
-      <p:sp>
-        <p:nvSpPr>
-          <p:cNvPr id="3" name="Subtitle 2">
-            <a:extLst>
-              <a:ext uri="{FF2B5EF4-FFF2-40B4-BE49-F238E27FC236}">
-                <a16:creationId xmlns:a16="http://schemas.microsoft.com/office/drawing/2014/main" id="{6BDA0964-D419-5F76-ABC2-81AE67A7EC58}"/>
-              </a:ext>
-            </a:extLst>
-          </p:cNvPr>
-          <p:cNvSpPr>
-            <a:spLocks noGrp="1"/>
-          </p:cNvSpPr>
-          <p:nvPr>
-            <p:ph type="subTitle" idx="1"/>
-          </p:nvPr>
-        </p:nvSpPr>
+        <p:style>
+          <a:lnRef idx="2">
+            <a:schemeClr val="accent1">
+              <a:shade val="50000"/>
+            </a:schemeClr>
+          </a:lnRef>
+          <a:fillRef idx="1">
+            <a:schemeClr val="accent1"/>
+          </a:fillRef>
+          <a:effectRef idx="0">
+            <a:schemeClr val="accent1"/>
+          </a:effectRef>
+          <a:fontRef idx="minor">
+            <a:schemeClr val="lt1"/>
+          </a:fontRef>
+        </p:style>
+        <p:txBody>
+          <a:bodyPr rtlCol="0" anchor="ctr"/>
+          <a:lstStyle/>
+          <a:p>
+            <a:pPr algn="ctr"/>
+            <a:endParaRPr lang="en-US"/>
+          </a:p>
+        </p:txBody>
+      </p:sp>
+      <p:pic>
+        <p:nvPicPr>
+          <p:cNvPr id="9" name="Picture 8">
+            <a:extLst>
+              <a:ext uri="{FF2B5EF4-FFF2-40B4-BE49-F238E27FC236}">
+                <a16:creationId xmlns:a16="http://schemas.microsoft.com/office/drawing/2014/main" id="{8285DB70-8BB3-5F93-5915-D42D260437BB}"/>
+              </a:ext>
+            </a:extLst>
+          </p:cNvPr>
+          <p:cNvPicPr>
+            <a:picLocks noChangeAspect="1"/>
+          </p:cNvPicPr>
+          <p:nvPr/>
+        </p:nvPicPr>
+        <p:blipFill>
+          <a:blip r:embed="rId2"/>
+          <a:srcRect l="1469" r="1232"/>
+          <a:stretch>
+            <a:fillRect/>
+          </a:stretch>
+        </p:blipFill>
         <p:spPr>
           <a:xfrm>
-            <a:off x="356260" y="976184"/>
-            <a:ext cx="11388436" cy="5301047"/>
+            <a:off x="1" y="10"/>
+            <a:ext cx="11862683" cy="6857990"/>
           </a:xfrm>
+          <a:custGeom>
+            <a:avLst/>
+            <a:gdLst/>
+            <a:ahLst/>
+            <a:cxnLst/>
+            <a:rect l="l" t="t" r="r" b="b"/>
+            <a:pathLst>
+              <a:path w="11862683" h="6858000">
+                <a:moveTo>
+                  <a:pt x="0" y="0"/>
+                </a:moveTo>
+                <a:lnTo>
+                  <a:pt x="4038600" y="0"/>
+                </a:lnTo>
+                <a:lnTo>
+                  <a:pt x="4114800" y="0"/>
+                </a:lnTo>
+                <a:lnTo>
+                  <a:pt x="4282294" y="0"/>
+                </a:lnTo>
+                <a:lnTo>
+                  <a:pt x="6139260" y="0"/>
+                </a:lnTo>
+                <a:lnTo>
+                  <a:pt x="6362810" y="0"/>
+                </a:lnTo>
+                <a:lnTo>
+                  <a:pt x="7272221" y="0"/>
+                </a:lnTo>
+                <a:lnTo>
+                  <a:pt x="10815342" y="0"/>
+                </a:lnTo>
+                <a:cubicBezTo>
+                  <a:pt x="10709672" y="35571"/>
+                  <a:pt x="10607020" y="78255"/>
+                  <a:pt x="10501350" y="110269"/>
+                </a:cubicBezTo>
+                <a:cubicBezTo>
+                  <a:pt x="10516447" y="145839"/>
+                  <a:pt x="10531542" y="138725"/>
+                  <a:pt x="10546639" y="135168"/>
+                </a:cubicBezTo>
+                <a:cubicBezTo>
+                  <a:pt x="10637212" y="120941"/>
+                  <a:pt x="10730806" y="110269"/>
+                  <a:pt x="10818360" y="71141"/>
+                </a:cubicBezTo>
+                <a:cubicBezTo>
+                  <a:pt x="10839496" y="64027"/>
+                  <a:pt x="10863648" y="64027"/>
+                  <a:pt x="10872705" y="88927"/>
+                </a:cubicBezTo>
+                <a:cubicBezTo>
+                  <a:pt x="10887801" y="124497"/>
+                  <a:pt x="10866668" y="145839"/>
+                  <a:pt x="10845532" y="163625"/>
+                </a:cubicBezTo>
+                <a:cubicBezTo>
+                  <a:pt x="10809304" y="195638"/>
+                  <a:pt x="10767036" y="188525"/>
+                  <a:pt x="10727787" y="192082"/>
+                </a:cubicBezTo>
+                <a:cubicBezTo>
+                  <a:pt x="10619098" y="209867"/>
+                  <a:pt x="10567772" y="259665"/>
+                  <a:pt x="10543619" y="373491"/>
+                </a:cubicBezTo>
+                <a:cubicBezTo>
+                  <a:pt x="10637212" y="327250"/>
+                  <a:pt x="10730806" y="384162"/>
+                  <a:pt x="10821380" y="352148"/>
+                </a:cubicBezTo>
+                <a:cubicBezTo>
+                  <a:pt x="10845532" y="345034"/>
+                  <a:pt x="10881763" y="355706"/>
+                  <a:pt x="10869686" y="394834"/>
+                </a:cubicBezTo>
+                <a:cubicBezTo>
+                  <a:pt x="10857610" y="430405"/>
+                  <a:pt x="10818360" y="458860"/>
+                  <a:pt x="10887801" y="451747"/>
+                </a:cubicBezTo>
+                <a:cubicBezTo>
+                  <a:pt x="10939127" y="448189"/>
+                  <a:pt x="10954222" y="405504"/>
+                  <a:pt x="10969318" y="359262"/>
+                </a:cubicBezTo>
+                <a:cubicBezTo>
+                  <a:pt x="10981394" y="334364"/>
+                  <a:pt x="11014605" y="320135"/>
+                  <a:pt x="11038758" y="334364"/>
+                </a:cubicBezTo>
+                <a:cubicBezTo>
+                  <a:pt x="11068949" y="348592"/>
+                  <a:pt x="11059892" y="387720"/>
+                  <a:pt x="11059892" y="416176"/>
+                </a:cubicBezTo>
+                <a:cubicBezTo>
+                  <a:pt x="11062912" y="469532"/>
+                  <a:pt x="11038758" y="494431"/>
+                  <a:pt x="10996491" y="505101"/>
+                </a:cubicBezTo>
+                <a:cubicBezTo>
+                  <a:pt x="10945164" y="519330"/>
+                  <a:pt x="10893840" y="537116"/>
+                  <a:pt x="10827418" y="558458"/>
+                </a:cubicBezTo>
+                <a:cubicBezTo>
+                  <a:pt x="10899878" y="594028"/>
+                  <a:pt x="10954222" y="586915"/>
+                  <a:pt x="11008566" y="558458"/>
+                </a:cubicBezTo>
+                <a:cubicBezTo>
+                  <a:pt x="11074988" y="526444"/>
+                  <a:pt x="11162542" y="483759"/>
+                  <a:pt x="11216886" y="522887"/>
+                </a:cubicBezTo>
+                <a:cubicBezTo>
+                  <a:pt x="11298403" y="579800"/>
+                  <a:pt x="11364824" y="544229"/>
+                  <a:pt x="11437284" y="533558"/>
+                </a:cubicBezTo>
+                <a:cubicBezTo>
+                  <a:pt x="11588242" y="512216"/>
+                  <a:pt x="11494648" y="480203"/>
+                  <a:pt x="11645605" y="462417"/>
+                </a:cubicBezTo>
+                <a:cubicBezTo>
+                  <a:pt x="11705988" y="455303"/>
+                  <a:pt x="11769390" y="426847"/>
+                  <a:pt x="11856944" y="465975"/>
+                </a:cubicBezTo>
+                <a:cubicBezTo>
+                  <a:pt x="11461437" y="672284"/>
+                  <a:pt x="11274250" y="658055"/>
+                  <a:pt x="10921012" y="910606"/>
+                </a:cubicBezTo>
+                <a:cubicBezTo>
+                  <a:pt x="10936107" y="935506"/>
+                  <a:pt x="10951202" y="924835"/>
+                  <a:pt x="10966299" y="921277"/>
+                </a:cubicBezTo>
+                <a:cubicBezTo>
+                  <a:pt x="10990452" y="917720"/>
+                  <a:pt x="11020644" y="903491"/>
+                  <a:pt x="11026682" y="949734"/>
+                </a:cubicBezTo>
+                <a:cubicBezTo>
+                  <a:pt x="11029702" y="985305"/>
+                  <a:pt x="11011585" y="1003089"/>
+                  <a:pt x="10981394" y="1006647"/>
+                </a:cubicBezTo>
+                <a:cubicBezTo>
+                  <a:pt x="10893840" y="1020875"/>
+                  <a:pt x="10815342" y="1070674"/>
+                  <a:pt x="10736844" y="1113358"/>
+                </a:cubicBezTo>
+                <a:cubicBezTo>
+                  <a:pt x="10700615" y="1131144"/>
+                  <a:pt x="10661366" y="1156043"/>
+                  <a:pt x="10676462" y="1220069"/>
+                </a:cubicBezTo>
+                <a:cubicBezTo>
+                  <a:pt x="10706652" y="1237855"/>
+                  <a:pt x="10727787" y="1212955"/>
+                  <a:pt x="10751940" y="1209399"/>
+                </a:cubicBezTo>
+                <a:cubicBezTo>
+                  <a:pt x="10776093" y="1205842"/>
+                  <a:pt x="10833457" y="1220069"/>
+                  <a:pt x="10818360" y="1230741"/>
+                </a:cubicBezTo>
+                <a:cubicBezTo>
+                  <a:pt x="10748920" y="1269868"/>
+                  <a:pt x="10875724" y="1365909"/>
+                  <a:pt x="10791190" y="1365909"/>
+                </a:cubicBezTo>
+                <a:cubicBezTo>
+                  <a:pt x="10652309" y="1365909"/>
+                  <a:pt x="10576830" y="1536647"/>
+                  <a:pt x="10443988" y="1540204"/>
+                </a:cubicBezTo>
+                <a:cubicBezTo>
+                  <a:pt x="10422854" y="1540204"/>
+                  <a:pt x="10413797" y="1572219"/>
+                  <a:pt x="10413797" y="1597117"/>
+                </a:cubicBezTo>
+                <a:cubicBezTo>
+                  <a:pt x="10413797" y="1629132"/>
+                  <a:pt x="10434930" y="1632688"/>
+                  <a:pt x="10456064" y="1636245"/>
+                </a:cubicBezTo>
+                <a:cubicBezTo>
+                  <a:pt x="10489275" y="1639802"/>
+                  <a:pt x="10525504" y="1597117"/>
+                  <a:pt x="10567772" y="1657587"/>
+                </a:cubicBezTo>
+                <a:cubicBezTo>
+                  <a:pt x="10489275" y="1693158"/>
+                  <a:pt x="10407758" y="1728729"/>
+                  <a:pt x="10410777" y="1849668"/>
+                </a:cubicBezTo>
+                <a:cubicBezTo>
+                  <a:pt x="10410777" y="1881683"/>
+                  <a:pt x="10377566" y="1895910"/>
+                  <a:pt x="10353413" y="1903025"/>
+                </a:cubicBezTo>
+                <a:cubicBezTo>
+                  <a:pt x="10311146" y="1917252"/>
+                  <a:pt x="10277935" y="1938595"/>
+                  <a:pt x="10253782" y="1984836"/>
+                </a:cubicBezTo>
+                <a:cubicBezTo>
+                  <a:pt x="10253782" y="1995507"/>
+                  <a:pt x="10253782" y="2002622"/>
+                  <a:pt x="10253782" y="2013292"/>
+                </a:cubicBezTo>
+                <a:cubicBezTo>
+                  <a:pt x="10259820" y="2123562"/>
+                  <a:pt x="10320202" y="2120004"/>
+                  <a:pt x="10386624" y="2102219"/>
+                </a:cubicBezTo>
+                <a:cubicBezTo>
+                  <a:pt x="10465122" y="2080877"/>
+                  <a:pt x="10543619" y="2038192"/>
+                  <a:pt x="10628156" y="2077320"/>
+                </a:cubicBezTo>
+                <a:cubicBezTo>
+                  <a:pt x="10510408" y="2130676"/>
+                  <a:pt x="10380586" y="2134233"/>
+                  <a:pt x="10271896" y="2208931"/>
+                </a:cubicBezTo>
+                <a:cubicBezTo>
+                  <a:pt x="10676462" y="2223159"/>
+                  <a:pt x="11032720" y="1984836"/>
+                  <a:pt x="11425208" y="1892353"/>
+                </a:cubicBezTo>
+                <a:cubicBezTo>
+                  <a:pt x="11413131" y="1952823"/>
+                  <a:pt x="11379920" y="1967051"/>
+                  <a:pt x="11352748" y="1974165"/>
+                </a:cubicBezTo>
+                <a:cubicBezTo>
+                  <a:pt x="11207830" y="2020407"/>
+                  <a:pt x="11081026" y="2112891"/>
+                  <a:pt x="10948184" y="2191146"/>
+                </a:cubicBezTo>
+                <a:cubicBezTo>
+                  <a:pt x="10893840" y="2223159"/>
+                  <a:pt x="10854590" y="2258731"/>
+                  <a:pt x="10833457" y="2326314"/>
+                </a:cubicBezTo>
+                <a:cubicBezTo>
+                  <a:pt x="10815342" y="2390340"/>
+                  <a:pt x="10779112" y="2418796"/>
+                  <a:pt x="10712690" y="2401012"/>
+                </a:cubicBezTo>
+                <a:cubicBezTo>
+                  <a:pt x="10658346" y="2386784"/>
+                  <a:pt x="10600982" y="2393898"/>
+                  <a:pt x="10543619" y="2401012"/>
+                </a:cubicBezTo>
+                <a:cubicBezTo>
+                  <a:pt x="10480218" y="2408126"/>
+                  <a:pt x="10407758" y="2479267"/>
+                  <a:pt x="10422854" y="2518395"/>
+                </a:cubicBezTo>
+                <a:cubicBezTo>
+                  <a:pt x="10453044" y="2582422"/>
+                  <a:pt x="10504370" y="2550408"/>
+                  <a:pt x="10546639" y="2543294"/>
+                </a:cubicBezTo>
+                <a:cubicBezTo>
+                  <a:pt x="10597964" y="2536181"/>
+                  <a:pt x="10691556" y="2518395"/>
+                  <a:pt x="10691556" y="2525509"/>
+                </a:cubicBezTo>
+                <a:cubicBezTo>
+                  <a:pt x="10724768" y="2685576"/>
+                  <a:pt x="10800246" y="2564636"/>
+                  <a:pt x="10854590" y="2564636"/>
+                </a:cubicBezTo>
+                <a:cubicBezTo>
+                  <a:pt x="10905916" y="2564636"/>
+                  <a:pt x="10957241" y="2546851"/>
+                  <a:pt x="11005548" y="2532623"/>
+                </a:cubicBezTo>
+                <a:cubicBezTo>
+                  <a:pt x="11068949" y="2514837"/>
+                  <a:pt x="11126312" y="2546851"/>
+                  <a:pt x="11186696" y="2553965"/>
+                </a:cubicBezTo>
+                <a:cubicBezTo>
+                  <a:pt x="11241040" y="2561080"/>
+                  <a:pt x="11210850" y="2653563"/>
+                  <a:pt x="11244060" y="2692689"/>
+                </a:cubicBezTo>
+                <a:cubicBezTo>
+                  <a:pt x="11250097" y="2703362"/>
+                  <a:pt x="11256136" y="2703362"/>
+                  <a:pt x="11262174" y="2703362"/>
+                </a:cubicBezTo>
+                <a:cubicBezTo>
+                  <a:pt x="11280289" y="2980812"/>
+                  <a:pt x="11597299" y="2913227"/>
+                  <a:pt x="11597299" y="2923898"/>
+                </a:cubicBezTo>
+                <a:cubicBezTo>
+                  <a:pt x="11624471" y="2941684"/>
+                  <a:pt x="11657682" y="2899000"/>
+                  <a:pt x="11690892" y="2941684"/>
+                </a:cubicBezTo>
+                <a:cubicBezTo>
+                  <a:pt x="11548993" y="3137322"/>
+                  <a:pt x="11331614" y="3183563"/>
+                  <a:pt x="11138390" y="3329402"/>
+                </a:cubicBezTo>
+                <a:cubicBezTo>
+                  <a:pt x="11298403" y="3379202"/>
+                  <a:pt x="11391998" y="3208463"/>
+                  <a:pt x="11509744" y="3229805"/>
+                </a:cubicBezTo>
+                <a:cubicBezTo>
+                  <a:pt x="11567107" y="3283162"/>
+                  <a:pt x="11395016" y="3368530"/>
+                  <a:pt x="11561068" y="3393429"/>
+                </a:cubicBezTo>
+                <a:cubicBezTo>
+                  <a:pt x="11488610" y="3439672"/>
+                  <a:pt x="11437284" y="3485914"/>
+                  <a:pt x="11385959" y="3539269"/>
+                </a:cubicBezTo>
+                <a:cubicBezTo>
+                  <a:pt x="11298403" y="3635309"/>
+                  <a:pt x="11280289" y="3699337"/>
+                  <a:pt x="11322556" y="3827390"/>
+                </a:cubicBezTo>
+                <a:cubicBezTo>
+                  <a:pt x="11349730" y="3912759"/>
+                  <a:pt x="11388978" y="3991015"/>
+                  <a:pt x="11352748" y="4090612"/>
+                </a:cubicBezTo>
+                <a:cubicBezTo>
+                  <a:pt x="11328595" y="4158196"/>
+                  <a:pt x="11337653" y="4204438"/>
+                  <a:pt x="11428226" y="4172424"/>
+                </a:cubicBezTo>
+                <a:cubicBezTo>
+                  <a:pt x="11524840" y="4140411"/>
+                  <a:pt x="11561068" y="4200882"/>
+                  <a:pt x="11536915" y="4321821"/>
+                </a:cubicBezTo>
+                <a:cubicBezTo>
+                  <a:pt x="11521821" y="4400076"/>
+                  <a:pt x="11536915" y="4424975"/>
+                  <a:pt x="11603338" y="4414305"/>
+                </a:cubicBezTo>
+                <a:cubicBezTo>
+                  <a:pt x="11675796" y="4403633"/>
+                  <a:pt x="11745236" y="4353835"/>
+                  <a:pt x="11835811" y="4378734"/>
+                </a:cubicBezTo>
+                <a:cubicBezTo>
+                  <a:pt x="11763352" y="4521016"/>
+                  <a:pt x="11609374" y="4478331"/>
+                  <a:pt x="11524840" y="4613499"/>
+                </a:cubicBezTo>
+                <a:cubicBezTo>
+                  <a:pt x="11624471" y="4613499"/>
+                  <a:pt x="11702969" y="4613499"/>
+                  <a:pt x="11775427" y="4585042"/>
+                </a:cubicBezTo>
+                <a:cubicBezTo>
+                  <a:pt x="11805619" y="4574373"/>
+                  <a:pt x="11838830" y="4560144"/>
+                  <a:pt x="11856944" y="4602828"/>
+                </a:cubicBezTo>
+                <a:cubicBezTo>
+                  <a:pt x="11878080" y="4652628"/>
+                  <a:pt x="11835811" y="4670412"/>
+                  <a:pt x="11811658" y="4677526"/>
+                </a:cubicBezTo>
+                <a:cubicBezTo>
+                  <a:pt x="11742216" y="4702425"/>
+                  <a:pt x="11687874" y="4759339"/>
+                  <a:pt x="11627490" y="4805580"/>
+                </a:cubicBezTo>
+                <a:cubicBezTo>
+                  <a:pt x="11497668" y="4905177"/>
+                  <a:pt x="11355767" y="4990547"/>
+                  <a:pt x="11247078" y="5154171"/>
+                </a:cubicBezTo>
+                <a:cubicBezTo>
+                  <a:pt x="11382940" y="5111487"/>
+                  <a:pt x="11485590" y="5011889"/>
+                  <a:pt x="11615414" y="4994104"/>
+                </a:cubicBezTo>
+                <a:cubicBezTo>
+                  <a:pt x="11503704" y="5143500"/>
+                  <a:pt x="11361806" y="5243097"/>
+                  <a:pt x="11228964" y="5353367"/>
+                </a:cubicBezTo>
+                <a:cubicBezTo>
+                  <a:pt x="11189714" y="5385379"/>
+                  <a:pt x="11150466" y="5406721"/>
+                  <a:pt x="11144428" y="5474306"/>
+                </a:cubicBezTo>
+                <a:cubicBezTo>
+                  <a:pt x="11126312" y="5605917"/>
+                  <a:pt x="11078008" y="5712629"/>
+                  <a:pt x="10969318" y="5769542"/>
+                </a:cubicBezTo>
+                <a:cubicBezTo>
+                  <a:pt x="10969318" y="5769542"/>
+                  <a:pt x="10975356" y="5790884"/>
+                  <a:pt x="10978374" y="5801555"/>
+                </a:cubicBezTo>
+                <a:cubicBezTo>
+                  <a:pt x="11044797" y="5805112"/>
+                  <a:pt x="11096122" y="5726858"/>
+                  <a:pt x="11177639" y="5755314"/>
+                </a:cubicBezTo>
+                <a:cubicBezTo>
+                  <a:pt x="11096122" y="5862025"/>
+                  <a:pt x="11029702" y="5954508"/>
+                  <a:pt x="10917992" y="6004307"/>
+                </a:cubicBezTo>
+                <a:cubicBezTo>
+                  <a:pt x="10827418" y="6043434"/>
+                  <a:pt x="10715710" y="6068335"/>
+                  <a:pt x="10649289" y="6196388"/>
+                </a:cubicBezTo>
+                <a:cubicBezTo>
+                  <a:pt x="10724768" y="6221287"/>
+                  <a:pt x="10782132" y="6189274"/>
+                  <a:pt x="10839496" y="6167932"/>
+                </a:cubicBezTo>
+                <a:cubicBezTo>
+                  <a:pt x="10927050" y="6132361"/>
+                  <a:pt x="11014605" y="6093234"/>
+                  <a:pt x="11102160" y="6057663"/>
+                </a:cubicBezTo>
+                <a:cubicBezTo>
+                  <a:pt x="11135372" y="6043434"/>
+                  <a:pt x="11171600" y="6036320"/>
+                  <a:pt x="11192734" y="6100347"/>
+                </a:cubicBezTo>
+                <a:cubicBezTo>
+                  <a:pt x="11081026" y="6114575"/>
+                  <a:pt x="11014605" y="6199945"/>
+                  <a:pt x="10945164" y="6281757"/>
+                </a:cubicBezTo>
+                <a:cubicBezTo>
+                  <a:pt x="10905916" y="6327999"/>
+                  <a:pt x="10872705" y="6388469"/>
+                  <a:pt x="10803265" y="6367127"/>
+                </a:cubicBezTo>
+                <a:cubicBezTo>
+                  <a:pt x="10767036" y="6356456"/>
+                  <a:pt x="10742882" y="6388469"/>
+                  <a:pt x="10745901" y="6431153"/>
+                </a:cubicBezTo>
+                <a:cubicBezTo>
+                  <a:pt x="10760998" y="6580550"/>
+                  <a:pt x="10673442" y="6630349"/>
+                  <a:pt x="10582868" y="6658805"/>
+                </a:cubicBezTo>
+                <a:cubicBezTo>
+                  <a:pt x="10450026" y="6701489"/>
+                  <a:pt x="10332280" y="6786859"/>
+                  <a:pt x="10208496" y="6858000"/>
+                </a:cubicBezTo>
+                <a:lnTo>
+                  <a:pt x="7272221" y="6858000"/>
+                </a:lnTo>
+                <a:lnTo>
+                  <a:pt x="6362810" y="6858000"/>
+                </a:lnTo>
+                <a:lnTo>
+                  <a:pt x="6139260" y="6858000"/>
+                </a:lnTo>
+                <a:lnTo>
+                  <a:pt x="4282294" y="6858000"/>
+                </a:lnTo>
+                <a:lnTo>
+                  <a:pt x="4114800" y="6858000"/>
+                </a:lnTo>
+                <a:lnTo>
+                  <a:pt x="4038600" y="6858000"/>
+                </a:lnTo>
+                <a:lnTo>
+                  <a:pt x="0" y="6858000"/>
+                </a:lnTo>
+                <a:close/>
+              </a:path>
+            </a:pathLst>
+          </a:custGeom>
         </p:spPr>
-        <p:txBody>
-          <a:bodyPr>
-            <a:normAutofit/>
+      </p:pic>
+      <p:sp>
+        <p:nvSpPr>
+          <p:cNvPr id="10" name="TextBox 9">
+            <a:extLst>
+              <a:ext uri="{FF2B5EF4-FFF2-40B4-BE49-F238E27FC236}">
+                <a16:creationId xmlns:a16="http://schemas.microsoft.com/office/drawing/2014/main" id="{7A2B8C82-4E52-A2E1-4649-536E048DC9EE}"/>
+              </a:ext>
+            </a:extLst>
+          </p:cNvPr>
+          <p:cNvSpPr txBox="1"/>
+          <p:nvPr/>
+        </p:nvSpPr>
+        <p:spPr>
+          <a:xfrm>
+            <a:off x="648392" y="864523"/>
+            <a:ext cx="2809703" cy="707886"/>
+          </a:xfrm>
+          <a:prstGeom prst="rect">
+            <a:avLst/>
+          </a:prstGeom>
+          <a:noFill/>
+        </p:spPr>
+        <p:txBody>
+          <a:bodyPr wrap="square" rtlCol="0">
+            <a:spAutoFit/>
           </a:bodyPr>
           <a:lstStyle/>
           <a:p>
-            <a:pPr algn="l"/>
-            <a:endParaRPr lang="en-US" sz="4400" b="1" dirty="0">
-              <a:solidFill>
-                <a:schemeClr val="bg1"/>
-              </a:solidFill>
-            </a:endParaRPr>
-          </a:p>
-          <a:p>
-            <a:pPr algn="l"/>
-            <a:r>
-              <a:rPr lang="en-US" sz="4000" dirty="0">
-                <a:solidFill>
-                  <a:srgbClr val="FFFF00"/>
-                </a:solidFill>
-                <a:latin typeface="Avenir Book" panose="02000503020000020003" pitchFamily="2" charset="0"/>
-              </a:rPr>
-              <a:t>    D                 A                  G              A   D  A</a:t>
-            </a:r>
-          </a:p>
-          <a:p>
-            <a:pPr algn="l"/>
             <a:r>
               <a:rPr lang="en-US" sz="4000" dirty="0">
                 <a:solidFill>
                   <a:schemeClr val="bg1"/>
                 </a:solidFill>
-                <a:latin typeface="Avenir Book" panose="02000503020000020003" pitchFamily="2" charset="0"/>
               </a:rPr>
-              <a:t>I exalt Thee, I exalt Thee, I exalt Thee, O Lord.</a:t>
-            </a:r>
-          </a:p>
-          <a:p>
-            <a:pPr algn="l"/>
-            <a:r>
-              <a:rPr lang="en-US" sz="4000" dirty="0">
-                <a:solidFill>
-                  <a:srgbClr val="FFFF00"/>
-                </a:solidFill>
-                <a:latin typeface="Avenir Book" panose="02000503020000020003" pitchFamily="2" charset="0"/>
-              </a:rPr>
-              <a:t>    D                 A                  G              A   D</a:t>
-            </a:r>
-          </a:p>
-          <a:p>
-            <a:pPr algn="l"/>
-            <a:r>
-              <a:rPr lang="en-US" sz="4000" dirty="0">
-                <a:solidFill>
-                  <a:schemeClr val="bg1"/>
-                </a:solidFill>
-                <a:latin typeface="Avenir Book" panose="02000503020000020003" pitchFamily="2" charset="0"/>
-              </a:rPr>
-              <a:t>I exalt Thee, I exalt Thee, I exalt Thee, O Lord.</a:t>
-            </a:r>
-          </a:p>
-          <a:p>
-            <a:pPr algn="l"/>
-            <a:endParaRPr lang="en-US" sz="4400" dirty="0">
-              <a:solidFill>
-                <a:schemeClr val="bg1"/>
-              </a:solidFill>
-            </a:endParaRPr>
-          </a:p>
-          <a:p>
-            <a:pPr algn="l"/>
-            <a:endParaRPr lang="en-US" sz="4400" dirty="0">
-              <a:solidFill>
-                <a:schemeClr val="bg1"/>
-              </a:solidFill>
-            </a:endParaRPr>
+              <a:t>I Exalt Thee</a:t>
+            </a:r>
           </a:p>
         </p:txBody>
       </p:sp>
@@ -3495,6 +3983,438 @@
 </file>
 
 <file path=ppt/slides/slide2.xml><?xml version="1.0" encoding="utf-8"?>
+<p:sld xmlns:a="http://schemas.openxmlformats.org/drawingml/2006/main" xmlns:r="http://schemas.openxmlformats.org/officeDocument/2006/relationships" xmlns:p="http://schemas.openxmlformats.org/presentationml/2006/main">
+  <p:cSld>
+    <p:bg>
+      <p:bgPr>
+        <a:solidFill>
+          <a:schemeClr val="tx1"/>
+        </a:solidFill>
+        <a:effectLst/>
+      </p:bgPr>
+    </p:bg>
+    <p:spTree>
+      <p:nvGrpSpPr>
+        <p:cNvPr id="1" name="">
+          <a:extLst>
+            <a:ext uri="{FF2B5EF4-FFF2-40B4-BE49-F238E27FC236}">
+              <a16:creationId xmlns:a16="http://schemas.microsoft.com/office/drawing/2014/main" id="{DDC0D60A-8A40-68FC-D974-A0C7AF0C500C}"/>
+            </a:ext>
+          </a:extLst>
+        </p:cNvPr>
+        <p:cNvGrpSpPr/>
+        <p:nvPr/>
+      </p:nvGrpSpPr>
+      <p:grpSpPr>
+        <a:xfrm>
+          <a:off x="0" y="0"/>
+          <a:ext cx="0" cy="0"/>
+          <a:chOff x="0" y="0"/>
+          <a:chExt cx="0" cy="0"/>
+        </a:xfrm>
+      </p:grpSpPr>
+      <p:sp>
+        <p:nvSpPr>
+          <p:cNvPr id="3" name="Subtitle 2">
+            <a:extLst>
+              <a:ext uri="{FF2B5EF4-FFF2-40B4-BE49-F238E27FC236}">
+                <a16:creationId xmlns:a16="http://schemas.microsoft.com/office/drawing/2014/main" id="{0E4262AE-4998-8DB9-D50B-85FC2946648F}"/>
+              </a:ext>
+            </a:extLst>
+          </p:cNvPr>
+          <p:cNvSpPr>
+            <a:spLocks noGrp="1"/>
+          </p:cNvSpPr>
+          <p:nvPr>
+            <p:ph type="subTitle" idx="1"/>
+          </p:nvPr>
+        </p:nvSpPr>
+        <p:spPr>
+          <a:xfrm>
+            <a:off x="356260" y="257176"/>
+            <a:ext cx="11388436" cy="6329362"/>
+          </a:xfrm>
+        </p:spPr>
+        <p:txBody>
+          <a:bodyPr>
+            <a:normAutofit/>
+          </a:bodyPr>
+          <a:lstStyle/>
+          <a:p>
+            <a:pPr algn="l"/>
+            <a:endParaRPr lang="en-US" sz="4400" b="1" dirty="0">
+              <a:solidFill>
+                <a:schemeClr val="bg1"/>
+              </a:solidFill>
+            </a:endParaRPr>
+          </a:p>
+          <a:p>
+            <a:pPr algn="l"/>
+            <a:r>
+              <a:rPr lang="en-US" sz="4000" dirty="0">
+                <a:solidFill>
+                  <a:srgbClr val="FFFF00"/>
+                </a:solidFill>
+                <a:latin typeface="Avenir Book" panose="02000503020000020003" pitchFamily="2" charset="0"/>
+              </a:rPr>
+              <a:t>    D                 A                  G              A  D    A</a:t>
+            </a:r>
+          </a:p>
+          <a:p>
+            <a:pPr algn="l"/>
+            <a:r>
+              <a:rPr lang="en-US" sz="4000" dirty="0">
+                <a:solidFill>
+                  <a:schemeClr val="bg1"/>
+                </a:solidFill>
+                <a:latin typeface="Avenir Book" panose="02000503020000020003" pitchFamily="2" charset="0"/>
+              </a:rPr>
+              <a:t>I exalt Thee, I exalt Thee, I exalt Thee, O Lord</a:t>
+            </a:r>
+          </a:p>
+          <a:p>
+            <a:pPr algn="l"/>
+            <a:r>
+              <a:rPr lang="en-US" sz="4000" dirty="0">
+                <a:solidFill>
+                  <a:srgbClr val="FFFF00"/>
+                </a:solidFill>
+                <a:latin typeface="Avenir Book" panose="02000503020000020003" pitchFamily="2" charset="0"/>
+              </a:rPr>
+              <a:t>    D                 A                  G               A D    A</a:t>
+            </a:r>
+          </a:p>
+          <a:p>
+            <a:pPr algn="l"/>
+            <a:r>
+              <a:rPr lang="en-US" sz="4000" dirty="0">
+                <a:solidFill>
+                  <a:schemeClr val="bg1"/>
+                </a:solidFill>
+                <a:latin typeface="Avenir Book" panose="02000503020000020003" pitchFamily="2" charset="0"/>
+              </a:rPr>
+              <a:t>I exalt Thee, I exalt Thee, I exalt Thee, O Lord</a:t>
+            </a:r>
+          </a:p>
+          <a:p>
+            <a:pPr algn="l"/>
+            <a:endParaRPr lang="en-US" sz="4400" dirty="0">
+              <a:solidFill>
+                <a:schemeClr val="bg1"/>
+              </a:solidFill>
+            </a:endParaRPr>
+          </a:p>
+          <a:p>
+            <a:pPr algn="l"/>
+            <a:endParaRPr lang="en-US" sz="4400" dirty="0">
+              <a:solidFill>
+                <a:schemeClr val="bg1"/>
+              </a:solidFill>
+            </a:endParaRPr>
+          </a:p>
+        </p:txBody>
+      </p:sp>
+      <p:sp>
+        <p:nvSpPr>
+          <p:cNvPr id="6" name="TextBox 5">
+            <a:extLst>
+              <a:ext uri="{FF2B5EF4-FFF2-40B4-BE49-F238E27FC236}">
+                <a16:creationId xmlns:a16="http://schemas.microsoft.com/office/drawing/2014/main" id="{7E880C5A-6BBD-F8DF-43FD-7B92C365B4B1}"/>
+              </a:ext>
+            </a:extLst>
+          </p:cNvPr>
+          <p:cNvSpPr txBox="1"/>
+          <p:nvPr/>
+        </p:nvSpPr>
+        <p:spPr>
+          <a:xfrm>
+            <a:off x="10591800" y="6273225"/>
+            <a:ext cx="1600200" cy="584775"/>
+          </a:xfrm>
+          <a:prstGeom prst="rect">
+            <a:avLst/>
+          </a:prstGeom>
+          <a:noFill/>
+        </p:spPr>
+        <p:txBody>
+          <a:bodyPr wrap="square" rtlCol="0">
+            <a:spAutoFit/>
+          </a:bodyPr>
+          <a:lstStyle/>
+          <a:p>
+            <a:pPr marL="0" marR="0" lvl="0" indent="0" algn="l" defTabSz="914400" rtl="0" eaLnBrk="1" fontAlgn="auto" latinLnBrk="0" hangingPunct="1">
+              <a:lnSpc>
+                <a:spcPct val="100000"/>
+              </a:lnSpc>
+              <a:spcBef>
+                <a:spcPts val="0"/>
+              </a:spcBef>
+              <a:spcAft>
+                <a:spcPts val="0"/>
+              </a:spcAft>
+              <a:buClrTx/>
+              <a:buSzTx/>
+              <a:buFontTx/>
+              <a:buNone/>
+              <a:tabLst/>
+              <a:defRPr/>
+            </a:pPr>
+            <a:r>
+              <a:rPr lang="en-US" sz="3200" b="1" dirty="0">
+                <a:solidFill>
+                  <a:srgbClr val="FFFF00"/>
+                </a:solidFill>
+                <a:latin typeface="Aptos" panose="02110004020202020204"/>
+              </a:rPr>
+              <a:t>1 of 2</a:t>
+            </a:r>
+            <a:endParaRPr kumimoji="0" lang="en-US" sz="3200" b="1" i="0" u="none" strike="noStrike" kern="1200" cap="none" spc="0" normalizeH="0" baseline="0" noProof="0" dirty="0">
+              <a:ln>
+                <a:noFill/>
+              </a:ln>
+              <a:solidFill>
+                <a:srgbClr val="FFFF00"/>
+              </a:solidFill>
+              <a:effectLst/>
+              <a:uLnTx/>
+              <a:uFillTx/>
+              <a:latin typeface="Aptos" panose="02110004020202020204"/>
+              <a:ea typeface="+mn-ea"/>
+              <a:cs typeface="+mn-cs"/>
+            </a:endParaRPr>
+          </a:p>
+        </p:txBody>
+      </p:sp>
+    </p:spTree>
+    <p:extLst>
+      <p:ext uri="{BB962C8B-B14F-4D97-AF65-F5344CB8AC3E}">
+        <p14:creationId xmlns:p14="http://schemas.microsoft.com/office/powerpoint/2010/main" val="2320763155"/>
+      </p:ext>
+    </p:extLst>
+  </p:cSld>
+  <p:clrMapOvr>
+    <a:masterClrMapping/>
+  </p:clrMapOvr>
+</p:sld>
+</file>
+
+<file path=ppt/slides/slide3.xml><?xml version="1.0" encoding="utf-8"?>
+<p:sld xmlns:a="http://schemas.openxmlformats.org/drawingml/2006/main" xmlns:r="http://schemas.openxmlformats.org/officeDocument/2006/relationships" xmlns:p="http://schemas.openxmlformats.org/presentationml/2006/main">
+  <p:cSld>
+    <p:bg>
+      <p:bgPr>
+        <a:solidFill>
+          <a:schemeClr val="tx1"/>
+        </a:solidFill>
+        <a:effectLst/>
+      </p:bgPr>
+    </p:bg>
+    <p:spTree>
+      <p:nvGrpSpPr>
+        <p:cNvPr id="1" name="">
+          <a:extLst>
+            <a:ext uri="{FF2B5EF4-FFF2-40B4-BE49-F238E27FC236}">
+              <a16:creationId xmlns:a16="http://schemas.microsoft.com/office/drawing/2014/main" id="{33B5A1C2-CA48-31D5-BD71-59990BC861E8}"/>
+            </a:ext>
+          </a:extLst>
+        </p:cNvPr>
+        <p:cNvGrpSpPr/>
+        <p:nvPr/>
+      </p:nvGrpSpPr>
+      <p:grpSpPr>
+        <a:xfrm>
+          <a:off x="0" y="0"/>
+          <a:ext cx="0" cy="0"/>
+          <a:chOff x="0" y="0"/>
+          <a:chExt cx="0" cy="0"/>
+        </a:xfrm>
+      </p:grpSpPr>
+      <p:sp>
+        <p:nvSpPr>
+          <p:cNvPr id="3" name="Subtitle 2">
+            <a:extLst>
+              <a:ext uri="{FF2B5EF4-FFF2-40B4-BE49-F238E27FC236}">
+                <a16:creationId xmlns:a16="http://schemas.microsoft.com/office/drawing/2014/main" id="{EB4D0CCE-3247-3FC8-55A1-D1784F66A078}"/>
+              </a:ext>
+            </a:extLst>
+          </p:cNvPr>
+          <p:cNvSpPr>
+            <a:spLocks noGrp="1"/>
+          </p:cNvSpPr>
+          <p:nvPr>
+            <p:ph type="subTitle" idx="1"/>
+          </p:nvPr>
+        </p:nvSpPr>
+        <p:spPr>
+          <a:xfrm>
+            <a:off x="356260" y="257176"/>
+            <a:ext cx="11388436" cy="6329362"/>
+          </a:xfrm>
+        </p:spPr>
+        <p:txBody>
+          <a:bodyPr>
+            <a:normAutofit/>
+          </a:bodyPr>
+          <a:lstStyle/>
+          <a:p>
+            <a:pPr algn="l"/>
+            <a:endParaRPr lang="en-US" sz="4400" b="1" dirty="0">
+              <a:solidFill>
+                <a:schemeClr val="bg1"/>
+              </a:solidFill>
+            </a:endParaRPr>
+          </a:p>
+          <a:p>
+            <a:pPr algn="l"/>
+            <a:r>
+              <a:rPr lang="en-US" sz="4000" dirty="0">
+                <a:solidFill>
+                  <a:srgbClr val="FFFF00"/>
+                </a:solidFill>
+                <a:latin typeface="Avenir Book" panose="02000503020000020003" pitchFamily="2" charset="0"/>
+              </a:rPr>
+              <a:t>    D                 A                  G              A  D    A</a:t>
+            </a:r>
+          </a:p>
+          <a:p>
+            <a:pPr algn="l"/>
+            <a:r>
+              <a:rPr lang="en-US" sz="4000" dirty="0">
+                <a:solidFill>
+                  <a:schemeClr val="bg1"/>
+                </a:solidFill>
+                <a:latin typeface="Avenir Book" panose="02000503020000020003" pitchFamily="2" charset="0"/>
+              </a:rPr>
+              <a:t>I exalt Thee, I exalt Thee, I exalt Thee, O Lord</a:t>
+            </a:r>
+          </a:p>
+          <a:p>
+            <a:pPr algn="l"/>
+            <a:r>
+              <a:rPr lang="en-US" sz="4000" dirty="0">
+                <a:solidFill>
+                  <a:srgbClr val="FFFF00"/>
+                </a:solidFill>
+                <a:latin typeface="Avenir Book" panose="02000503020000020003" pitchFamily="2" charset="0"/>
+              </a:rPr>
+              <a:t>    D                 A                  G               A D</a:t>
+            </a:r>
+          </a:p>
+          <a:p>
+            <a:pPr algn="l"/>
+            <a:r>
+              <a:rPr lang="en-US" sz="4000" dirty="0">
+                <a:solidFill>
+                  <a:schemeClr val="bg1"/>
+                </a:solidFill>
+                <a:latin typeface="Avenir Book" panose="02000503020000020003" pitchFamily="2" charset="0"/>
+              </a:rPr>
+              <a:t>I exalt Thee, I exalt Thee, I exalt Thee, O Lord</a:t>
+            </a:r>
+          </a:p>
+          <a:p>
+            <a:pPr algn="l"/>
+            <a:endParaRPr lang="en-US" sz="4400" dirty="0">
+              <a:solidFill>
+                <a:schemeClr val="bg1"/>
+              </a:solidFill>
+            </a:endParaRPr>
+          </a:p>
+          <a:p>
+            <a:pPr algn="l"/>
+            <a:endParaRPr lang="en-US" sz="4400" dirty="0">
+              <a:solidFill>
+                <a:schemeClr val="bg1"/>
+              </a:solidFill>
+            </a:endParaRPr>
+          </a:p>
+        </p:txBody>
+      </p:sp>
+      <p:sp>
+        <p:nvSpPr>
+          <p:cNvPr id="6" name="TextBox 5">
+            <a:extLst>
+              <a:ext uri="{FF2B5EF4-FFF2-40B4-BE49-F238E27FC236}">
+                <a16:creationId xmlns:a16="http://schemas.microsoft.com/office/drawing/2014/main" id="{38DEA94E-DE28-0C97-7042-04CA992B9FCE}"/>
+              </a:ext>
+            </a:extLst>
+          </p:cNvPr>
+          <p:cNvSpPr txBox="1"/>
+          <p:nvPr/>
+        </p:nvSpPr>
+        <p:spPr>
+          <a:xfrm>
+            <a:off x="10591800" y="6273225"/>
+            <a:ext cx="1600200" cy="584775"/>
+          </a:xfrm>
+          <a:prstGeom prst="rect">
+            <a:avLst/>
+          </a:prstGeom>
+          <a:noFill/>
+        </p:spPr>
+        <p:txBody>
+          <a:bodyPr wrap="square" rtlCol="0">
+            <a:spAutoFit/>
+          </a:bodyPr>
+          <a:lstStyle/>
+          <a:p>
+            <a:pPr marL="0" marR="0" lvl="0" indent="0" algn="l" defTabSz="914400" rtl="0" eaLnBrk="1" fontAlgn="auto" latinLnBrk="0" hangingPunct="1">
+              <a:lnSpc>
+                <a:spcPct val="100000"/>
+              </a:lnSpc>
+              <a:spcBef>
+                <a:spcPts val="0"/>
+              </a:spcBef>
+              <a:spcAft>
+                <a:spcPts val="0"/>
+              </a:spcAft>
+              <a:buClrTx/>
+              <a:buSzTx/>
+              <a:buFontTx/>
+              <a:buNone/>
+              <a:tabLst/>
+              <a:defRPr/>
+            </a:pPr>
+            <a:r>
+              <a:rPr lang="en-US" sz="3200" b="1" dirty="0">
+                <a:solidFill>
+                  <a:srgbClr val="FFFF00"/>
+                </a:solidFill>
+                <a:latin typeface="Aptos" panose="02110004020202020204"/>
+              </a:rPr>
+              <a:t>2 of 2</a:t>
+            </a:r>
+            <a:endParaRPr kumimoji="0" lang="en-US" sz="3200" b="1" i="0" u="none" strike="noStrike" kern="1200" cap="none" spc="0" normalizeH="0" baseline="0" noProof="0" dirty="0">
+              <a:ln>
+                <a:noFill/>
+              </a:ln>
+              <a:solidFill>
+                <a:srgbClr val="FFFF00"/>
+              </a:solidFill>
+              <a:effectLst/>
+              <a:uLnTx/>
+              <a:uFillTx/>
+              <a:latin typeface="Aptos" panose="02110004020202020204"/>
+              <a:ea typeface="+mn-ea"/>
+              <a:cs typeface="+mn-cs"/>
+            </a:endParaRPr>
+          </a:p>
+        </p:txBody>
+      </p:sp>
+    </p:spTree>
+    <p:extLst>
+      <p:ext uri="{BB962C8B-B14F-4D97-AF65-F5344CB8AC3E}">
+        <p14:creationId xmlns:p14="http://schemas.microsoft.com/office/powerpoint/2010/main" val="1475441142"/>
+      </p:ext>
+    </p:extLst>
+  </p:cSld>
+  <p:clrMapOvr>
+    <a:masterClrMapping/>
+  </p:clrMapOvr>
+</p:sld>
+</file>
+
+<file path=ppt/slides/slide4.xml><?xml version="1.0" encoding="utf-8"?>
 <p:sld xmlns:a="http://schemas.openxmlformats.org/drawingml/2006/main" xmlns:r="http://schemas.openxmlformats.org/officeDocument/2006/relationships" xmlns:p="http://schemas.openxmlformats.org/presentationml/2006/main">
   <p:cSld>
     <p:bg>
@@ -3529,68 +4449,29 @@
       </p:grpSpPr>
       <p:sp>
         <p:nvSpPr>
-          <p:cNvPr id="2" name="Title 1">
-            <a:extLst>
-              <a:ext uri="{FF2B5EF4-FFF2-40B4-BE49-F238E27FC236}">
-                <a16:creationId xmlns:a16="http://schemas.microsoft.com/office/drawing/2014/main" id="{E20BEFD4-AEEA-DEDC-1E90-985E95994B43}"/>
-              </a:ext>
-            </a:extLst>
-          </p:cNvPr>
-          <p:cNvSpPr>
-            <a:spLocks noGrp="1"/>
-          </p:cNvSpPr>
-          <p:nvPr>
-            <p:ph type="ctrTitle"/>
+          <p:cNvPr id="3" name="Subtitle 2">
+            <a:extLst>
+              <a:ext uri="{FF2B5EF4-FFF2-40B4-BE49-F238E27FC236}">
+                <a16:creationId xmlns:a16="http://schemas.microsoft.com/office/drawing/2014/main" id="{A11464B6-3227-4545-6D6A-EBC1AD630855}"/>
+              </a:ext>
+            </a:extLst>
+          </p:cNvPr>
+          <p:cNvSpPr>
+            <a:spLocks noGrp="1"/>
+          </p:cNvSpPr>
+          <p:nvPr>
+            <p:ph type="subTitle" idx="1"/>
           </p:nvPr>
         </p:nvSpPr>
         <p:spPr>
           <a:xfrm>
-            <a:off x="0" y="22612"/>
-            <a:ext cx="12192000" cy="953572"/>
+            <a:off x="356260" y="200025"/>
+            <a:ext cx="11388436" cy="6357937"/>
           </a:xfrm>
         </p:spPr>
         <p:txBody>
-          <a:bodyPr/>
-          <a:lstStyle/>
-          <a:p>
-            <a:pPr algn="l"/>
-            <a:r>
-              <a:rPr lang="en-US" dirty="0">
-                <a:solidFill>
-                  <a:schemeClr val="bg1"/>
-                </a:solidFill>
-                <a:latin typeface="Avenir Book" panose="02000503020000020003" pitchFamily="2" charset="0"/>
-              </a:rPr>
-              <a:t>I Exalt Thee</a:t>
-            </a:r>
-          </a:p>
-        </p:txBody>
-      </p:sp>
-      <p:sp>
-        <p:nvSpPr>
-          <p:cNvPr id="3" name="Subtitle 2">
-            <a:extLst>
-              <a:ext uri="{FF2B5EF4-FFF2-40B4-BE49-F238E27FC236}">
-                <a16:creationId xmlns:a16="http://schemas.microsoft.com/office/drawing/2014/main" id="{A11464B6-3227-4545-6D6A-EBC1AD630855}"/>
-              </a:ext>
-            </a:extLst>
-          </p:cNvPr>
-          <p:cNvSpPr>
-            <a:spLocks noGrp="1"/>
-          </p:cNvSpPr>
-          <p:nvPr>
-            <p:ph type="subTitle" idx="1"/>
-          </p:nvPr>
-        </p:nvSpPr>
-        <p:spPr>
-          <a:xfrm>
-            <a:off x="356260" y="976184"/>
-            <a:ext cx="11388436" cy="5301047"/>
-          </a:xfrm>
-        </p:spPr>
-        <p:txBody>
           <a:bodyPr>
-            <a:normAutofit fontScale="92500" lnSpcReduction="10000"/>
+            <a:normAutofit/>
           </a:bodyPr>
           <a:lstStyle/>
           <a:p>
@@ -3634,7 +4515,7 @@
                 </a:solidFill>
                 <a:latin typeface="Avenir Book" panose="02000503020000020003" pitchFamily="2" charset="0"/>
               </a:rPr>
-              <a:t>               Em                A            D</a:t>
+              <a:t>               Em             A             D</a:t>
             </a:r>
           </a:p>
           <a:p>
@@ -3658,7 +4539,7 @@
                 </a:solidFill>
                 <a:latin typeface="Avenir Book" panose="02000503020000020003" pitchFamily="2" charset="0"/>
               </a:rPr>
-              <a:t> D             Em         A                           D  Bm</a:t>
+              <a:t> D             Em             A                           D  Bm</a:t>
             </a:r>
           </a:p>
           <a:p>
@@ -3682,7 +4563,7 @@
                 </a:solidFill>
                 <a:latin typeface="Avenir Book" panose="02000503020000020003" pitchFamily="2" charset="0"/>
               </a:rPr>
-              <a:t>               Em                A            D</a:t>
+              <a:t>               Em            A             D</a:t>
             </a:r>
           </a:p>
           <a:p>
@@ -3708,6 +4589,438 @@
     <p:extLst>
       <p:ext uri="{BB962C8B-B14F-4D97-AF65-F5344CB8AC3E}">
         <p14:creationId xmlns:p14="http://schemas.microsoft.com/office/powerpoint/2010/main" val="1986578136"/>
+      </p:ext>
+    </p:extLst>
+  </p:cSld>
+  <p:clrMapOvr>
+    <a:masterClrMapping/>
+  </p:clrMapOvr>
+</p:sld>
+</file>
+
+<file path=ppt/slides/slide5.xml><?xml version="1.0" encoding="utf-8"?>
+<p:sld xmlns:a="http://schemas.openxmlformats.org/drawingml/2006/main" xmlns:r="http://schemas.openxmlformats.org/officeDocument/2006/relationships" xmlns:p="http://schemas.openxmlformats.org/presentationml/2006/main">
+  <p:cSld>
+    <p:bg>
+      <p:bgPr>
+        <a:solidFill>
+          <a:schemeClr val="tx1"/>
+        </a:solidFill>
+        <a:effectLst/>
+      </p:bgPr>
+    </p:bg>
+    <p:spTree>
+      <p:nvGrpSpPr>
+        <p:cNvPr id="1" name="">
+          <a:extLst>
+            <a:ext uri="{FF2B5EF4-FFF2-40B4-BE49-F238E27FC236}">
+              <a16:creationId xmlns:a16="http://schemas.microsoft.com/office/drawing/2014/main" id="{42F47D69-8EAF-9A33-ED4F-ED66EF15662E}"/>
+            </a:ext>
+          </a:extLst>
+        </p:cNvPr>
+        <p:cNvGrpSpPr/>
+        <p:nvPr/>
+      </p:nvGrpSpPr>
+      <p:grpSpPr>
+        <a:xfrm>
+          <a:off x="0" y="0"/>
+          <a:ext cx="0" cy="0"/>
+          <a:chOff x="0" y="0"/>
+          <a:chExt cx="0" cy="0"/>
+        </a:xfrm>
+      </p:grpSpPr>
+      <p:sp>
+        <p:nvSpPr>
+          <p:cNvPr id="3" name="Subtitle 2">
+            <a:extLst>
+              <a:ext uri="{FF2B5EF4-FFF2-40B4-BE49-F238E27FC236}">
+                <a16:creationId xmlns:a16="http://schemas.microsoft.com/office/drawing/2014/main" id="{C73D5CD6-AF31-536E-392B-C2A1A3700901}"/>
+              </a:ext>
+            </a:extLst>
+          </p:cNvPr>
+          <p:cNvSpPr>
+            <a:spLocks noGrp="1"/>
+          </p:cNvSpPr>
+          <p:nvPr>
+            <p:ph type="subTitle" idx="1"/>
+          </p:nvPr>
+        </p:nvSpPr>
+        <p:spPr>
+          <a:xfrm>
+            <a:off x="356260" y="257176"/>
+            <a:ext cx="11388436" cy="6329362"/>
+          </a:xfrm>
+        </p:spPr>
+        <p:txBody>
+          <a:bodyPr>
+            <a:normAutofit/>
+          </a:bodyPr>
+          <a:lstStyle/>
+          <a:p>
+            <a:pPr algn="l"/>
+            <a:endParaRPr lang="en-US" sz="4400" b="1" dirty="0">
+              <a:solidFill>
+                <a:schemeClr val="bg1"/>
+              </a:solidFill>
+            </a:endParaRPr>
+          </a:p>
+          <a:p>
+            <a:pPr algn="l"/>
+            <a:r>
+              <a:rPr lang="en-US" sz="4000" dirty="0">
+                <a:solidFill>
+                  <a:srgbClr val="FFFF00"/>
+                </a:solidFill>
+                <a:latin typeface="Avenir Book" panose="02000503020000020003" pitchFamily="2" charset="0"/>
+              </a:rPr>
+              <a:t>    D                 A                  G              A  D    A</a:t>
+            </a:r>
+          </a:p>
+          <a:p>
+            <a:pPr algn="l"/>
+            <a:r>
+              <a:rPr lang="en-US" sz="4000" dirty="0">
+                <a:solidFill>
+                  <a:schemeClr val="bg1"/>
+                </a:solidFill>
+                <a:latin typeface="Avenir Book" panose="02000503020000020003" pitchFamily="2" charset="0"/>
+              </a:rPr>
+              <a:t>I exalt Thee, I exalt Thee, I exalt Thee, O Lord</a:t>
+            </a:r>
+          </a:p>
+          <a:p>
+            <a:pPr algn="l"/>
+            <a:r>
+              <a:rPr lang="en-US" sz="4000" dirty="0">
+                <a:solidFill>
+                  <a:srgbClr val="FFFF00"/>
+                </a:solidFill>
+                <a:latin typeface="Avenir Book" panose="02000503020000020003" pitchFamily="2" charset="0"/>
+              </a:rPr>
+              <a:t>    D                 A                  G               A D    A</a:t>
+            </a:r>
+          </a:p>
+          <a:p>
+            <a:pPr algn="l"/>
+            <a:r>
+              <a:rPr lang="en-US" sz="4000" dirty="0">
+                <a:solidFill>
+                  <a:schemeClr val="bg1"/>
+                </a:solidFill>
+                <a:latin typeface="Avenir Book" panose="02000503020000020003" pitchFamily="2" charset="0"/>
+              </a:rPr>
+              <a:t>I exalt Thee, I exalt Thee, I exalt Thee, O Lord</a:t>
+            </a:r>
+          </a:p>
+          <a:p>
+            <a:pPr algn="l"/>
+            <a:endParaRPr lang="en-US" sz="4400" dirty="0">
+              <a:solidFill>
+                <a:schemeClr val="bg1"/>
+              </a:solidFill>
+            </a:endParaRPr>
+          </a:p>
+          <a:p>
+            <a:pPr algn="l"/>
+            <a:endParaRPr lang="en-US" sz="4400" dirty="0">
+              <a:solidFill>
+                <a:schemeClr val="bg1"/>
+              </a:solidFill>
+            </a:endParaRPr>
+          </a:p>
+        </p:txBody>
+      </p:sp>
+      <p:sp>
+        <p:nvSpPr>
+          <p:cNvPr id="5" name="TextBox 4">
+            <a:extLst>
+              <a:ext uri="{FF2B5EF4-FFF2-40B4-BE49-F238E27FC236}">
+                <a16:creationId xmlns:a16="http://schemas.microsoft.com/office/drawing/2014/main" id="{EC9DAC60-D22A-8045-0431-0DBC21A68E58}"/>
+              </a:ext>
+            </a:extLst>
+          </p:cNvPr>
+          <p:cNvSpPr txBox="1"/>
+          <p:nvPr/>
+        </p:nvSpPr>
+        <p:spPr>
+          <a:xfrm>
+            <a:off x="10591800" y="6273225"/>
+            <a:ext cx="1600200" cy="584775"/>
+          </a:xfrm>
+          <a:prstGeom prst="rect">
+            <a:avLst/>
+          </a:prstGeom>
+          <a:noFill/>
+        </p:spPr>
+        <p:txBody>
+          <a:bodyPr wrap="square" rtlCol="0">
+            <a:spAutoFit/>
+          </a:bodyPr>
+          <a:lstStyle/>
+          <a:p>
+            <a:pPr marL="0" marR="0" lvl="0" indent="0" algn="l" defTabSz="914400" rtl="0" eaLnBrk="1" fontAlgn="auto" latinLnBrk="0" hangingPunct="1">
+              <a:lnSpc>
+                <a:spcPct val="100000"/>
+              </a:lnSpc>
+              <a:spcBef>
+                <a:spcPts val="0"/>
+              </a:spcBef>
+              <a:spcAft>
+                <a:spcPts val="0"/>
+              </a:spcAft>
+              <a:buClrTx/>
+              <a:buSzTx/>
+              <a:buFontTx/>
+              <a:buNone/>
+              <a:tabLst/>
+              <a:defRPr/>
+            </a:pPr>
+            <a:r>
+              <a:rPr lang="en-US" sz="3200" b="1" dirty="0">
+                <a:solidFill>
+                  <a:srgbClr val="FFFF00"/>
+                </a:solidFill>
+                <a:latin typeface="Aptos" panose="02110004020202020204"/>
+              </a:rPr>
+              <a:t>1 of 2</a:t>
+            </a:r>
+            <a:endParaRPr kumimoji="0" lang="en-US" sz="3200" b="1" i="0" u="none" strike="noStrike" kern="1200" cap="none" spc="0" normalizeH="0" baseline="0" noProof="0" dirty="0">
+              <a:ln>
+                <a:noFill/>
+              </a:ln>
+              <a:solidFill>
+                <a:srgbClr val="FFFF00"/>
+              </a:solidFill>
+              <a:effectLst/>
+              <a:uLnTx/>
+              <a:uFillTx/>
+              <a:latin typeface="Aptos" panose="02110004020202020204"/>
+              <a:ea typeface="+mn-ea"/>
+              <a:cs typeface="+mn-cs"/>
+            </a:endParaRPr>
+          </a:p>
+        </p:txBody>
+      </p:sp>
+    </p:spTree>
+    <p:extLst>
+      <p:ext uri="{BB962C8B-B14F-4D97-AF65-F5344CB8AC3E}">
+        <p14:creationId xmlns:p14="http://schemas.microsoft.com/office/powerpoint/2010/main" val="2361066031"/>
+      </p:ext>
+    </p:extLst>
+  </p:cSld>
+  <p:clrMapOvr>
+    <a:masterClrMapping/>
+  </p:clrMapOvr>
+</p:sld>
+</file>
+
+<file path=ppt/slides/slide6.xml><?xml version="1.0" encoding="utf-8"?>
+<p:sld xmlns:a="http://schemas.openxmlformats.org/drawingml/2006/main" xmlns:r="http://schemas.openxmlformats.org/officeDocument/2006/relationships" xmlns:p="http://schemas.openxmlformats.org/presentationml/2006/main">
+  <p:cSld>
+    <p:bg>
+      <p:bgPr>
+        <a:solidFill>
+          <a:schemeClr val="tx1"/>
+        </a:solidFill>
+        <a:effectLst/>
+      </p:bgPr>
+    </p:bg>
+    <p:spTree>
+      <p:nvGrpSpPr>
+        <p:cNvPr id="1" name="">
+          <a:extLst>
+            <a:ext uri="{FF2B5EF4-FFF2-40B4-BE49-F238E27FC236}">
+              <a16:creationId xmlns:a16="http://schemas.microsoft.com/office/drawing/2014/main" id="{EF92FCCE-EE15-D505-704A-CC0D91B23EF5}"/>
+            </a:ext>
+          </a:extLst>
+        </p:cNvPr>
+        <p:cNvGrpSpPr/>
+        <p:nvPr/>
+      </p:nvGrpSpPr>
+      <p:grpSpPr>
+        <a:xfrm>
+          <a:off x="0" y="0"/>
+          <a:ext cx="0" cy="0"/>
+          <a:chOff x="0" y="0"/>
+          <a:chExt cx="0" cy="0"/>
+        </a:xfrm>
+      </p:grpSpPr>
+      <p:sp>
+        <p:nvSpPr>
+          <p:cNvPr id="3" name="Subtitle 2">
+            <a:extLst>
+              <a:ext uri="{FF2B5EF4-FFF2-40B4-BE49-F238E27FC236}">
+                <a16:creationId xmlns:a16="http://schemas.microsoft.com/office/drawing/2014/main" id="{BB770953-B491-DAA5-DEA8-5FC78058B750}"/>
+              </a:ext>
+            </a:extLst>
+          </p:cNvPr>
+          <p:cNvSpPr>
+            <a:spLocks noGrp="1"/>
+          </p:cNvSpPr>
+          <p:nvPr>
+            <p:ph type="subTitle" idx="1"/>
+          </p:nvPr>
+        </p:nvSpPr>
+        <p:spPr>
+          <a:xfrm>
+            <a:off x="356260" y="257176"/>
+            <a:ext cx="11388436" cy="6329362"/>
+          </a:xfrm>
+        </p:spPr>
+        <p:txBody>
+          <a:bodyPr>
+            <a:normAutofit/>
+          </a:bodyPr>
+          <a:lstStyle/>
+          <a:p>
+            <a:pPr algn="l"/>
+            <a:endParaRPr lang="en-US" sz="4400" b="1" dirty="0">
+              <a:solidFill>
+                <a:schemeClr val="bg1"/>
+              </a:solidFill>
+            </a:endParaRPr>
+          </a:p>
+          <a:p>
+            <a:pPr algn="l"/>
+            <a:r>
+              <a:rPr lang="en-US" sz="4000" dirty="0">
+                <a:solidFill>
+                  <a:srgbClr val="FFFF00"/>
+                </a:solidFill>
+                <a:latin typeface="Avenir Book" panose="02000503020000020003" pitchFamily="2" charset="0"/>
+              </a:rPr>
+              <a:t>    D                 A                  G              A  D    A</a:t>
+            </a:r>
+          </a:p>
+          <a:p>
+            <a:pPr algn="l"/>
+            <a:r>
+              <a:rPr lang="en-US" sz="4000" dirty="0">
+                <a:solidFill>
+                  <a:schemeClr val="bg1"/>
+                </a:solidFill>
+                <a:latin typeface="Avenir Book" panose="02000503020000020003" pitchFamily="2" charset="0"/>
+              </a:rPr>
+              <a:t>I exalt Thee, I exalt Thee, I exalt Thee, O Lord</a:t>
+            </a:r>
+          </a:p>
+          <a:p>
+            <a:pPr algn="l"/>
+            <a:r>
+              <a:rPr lang="en-US" sz="4000" dirty="0">
+                <a:solidFill>
+                  <a:srgbClr val="FFFF00"/>
+                </a:solidFill>
+                <a:latin typeface="Avenir Book" panose="02000503020000020003" pitchFamily="2" charset="0"/>
+              </a:rPr>
+              <a:t>    D                 A                  G               A D</a:t>
+            </a:r>
+          </a:p>
+          <a:p>
+            <a:pPr algn="l"/>
+            <a:r>
+              <a:rPr lang="en-US" sz="4000" dirty="0">
+                <a:solidFill>
+                  <a:schemeClr val="bg1"/>
+                </a:solidFill>
+                <a:latin typeface="Avenir Book" panose="02000503020000020003" pitchFamily="2" charset="0"/>
+              </a:rPr>
+              <a:t>I exalt Thee, I exalt Thee, I exalt Thee, O Lord</a:t>
+            </a:r>
+          </a:p>
+          <a:p>
+            <a:pPr algn="l"/>
+            <a:endParaRPr lang="en-US" sz="4400" dirty="0">
+              <a:solidFill>
+                <a:schemeClr val="bg1"/>
+              </a:solidFill>
+            </a:endParaRPr>
+          </a:p>
+          <a:p>
+            <a:pPr algn="l"/>
+            <a:endParaRPr lang="en-US" sz="4400" dirty="0">
+              <a:solidFill>
+                <a:schemeClr val="bg1"/>
+              </a:solidFill>
+            </a:endParaRPr>
+          </a:p>
+        </p:txBody>
+      </p:sp>
+      <p:sp>
+        <p:nvSpPr>
+          <p:cNvPr id="2" name="TextBox 1">
+            <a:extLst>
+              <a:ext uri="{FF2B5EF4-FFF2-40B4-BE49-F238E27FC236}">
+                <a16:creationId xmlns:a16="http://schemas.microsoft.com/office/drawing/2014/main" id="{8A2C0076-0F73-2133-C1CF-BCAE4DB8346E}"/>
+              </a:ext>
+            </a:extLst>
+          </p:cNvPr>
+          <p:cNvSpPr txBox="1"/>
+          <p:nvPr/>
+        </p:nvSpPr>
+        <p:spPr>
+          <a:xfrm>
+            <a:off x="9715500" y="6273225"/>
+            <a:ext cx="2476500" cy="584775"/>
+          </a:xfrm>
+          <a:prstGeom prst="rect">
+            <a:avLst/>
+          </a:prstGeom>
+          <a:noFill/>
+        </p:spPr>
+        <p:txBody>
+          <a:bodyPr wrap="square" rtlCol="0">
+            <a:spAutoFit/>
+          </a:bodyPr>
+          <a:lstStyle/>
+          <a:p>
+            <a:pPr marL="0" marR="0" lvl="0" indent="0" algn="l" defTabSz="914400" rtl="0" eaLnBrk="1" fontAlgn="auto" latinLnBrk="0" hangingPunct="1">
+              <a:lnSpc>
+                <a:spcPct val="100000"/>
+              </a:lnSpc>
+              <a:spcBef>
+                <a:spcPts val="0"/>
+              </a:spcBef>
+              <a:spcAft>
+                <a:spcPts val="0"/>
+              </a:spcAft>
+              <a:buClrTx/>
+              <a:buSzTx/>
+              <a:buFontTx/>
+              <a:buNone/>
+              <a:tabLst/>
+              <a:defRPr/>
+            </a:pPr>
+            <a:r>
+              <a:rPr lang="en-US" sz="3200" b="1" dirty="0">
+                <a:solidFill>
+                  <a:srgbClr val="FFFF00"/>
+                </a:solidFill>
+                <a:latin typeface="Aptos" panose="02110004020202020204"/>
+              </a:rPr>
+              <a:t>2 of 2 &amp; END</a:t>
+            </a:r>
+            <a:endParaRPr kumimoji="0" lang="en-US" sz="3200" b="1" i="0" u="none" strike="noStrike" kern="1200" cap="none" spc="0" normalizeH="0" baseline="0" noProof="0" dirty="0">
+              <a:ln>
+                <a:noFill/>
+              </a:ln>
+              <a:solidFill>
+                <a:srgbClr val="FFFF00"/>
+              </a:solidFill>
+              <a:effectLst/>
+              <a:uLnTx/>
+              <a:uFillTx/>
+              <a:latin typeface="Aptos" panose="02110004020202020204"/>
+              <a:ea typeface="+mn-ea"/>
+              <a:cs typeface="+mn-cs"/>
+            </a:endParaRPr>
+          </a:p>
+        </p:txBody>
+      </p:sp>
+    </p:spTree>
+    <p:extLst>
+      <p:ext uri="{BB962C8B-B14F-4D97-AF65-F5344CB8AC3E}">
+        <p14:creationId xmlns:p14="http://schemas.microsoft.com/office/powerpoint/2010/main" val="2844874985"/>
       </p:ext>
     </p:extLst>
   </p:cSld>
